--- a/docs/Automated Pneumonia and COVID-19 Detection from Chest X-Ray Images.pptx
+++ b/docs/Automated Pneumonia and COVID-19 Detection from Chest X-Ray Images.pptx
@@ -549,6 +549,258 @@
     </a:lvl9pPr>
   </p:notesStyle>
 </p:notesMaster>
+</file>
+
+<file path=ppt/notesSlides/notesSlide1.xml><?xml version="1.0" encoding="utf-8"?>
+<p:notes xmlns:a="http://schemas.openxmlformats.org/drawingml/2006/main" xmlns:r="http://schemas.openxmlformats.org/officeDocument/2006/relationships" xmlns:p="http://schemas.openxmlformats.org/presentationml/2006/main">
+  <p:cSld>
+    <p:spTree>
+      <p:nvGrpSpPr>
+        <p:cNvPr id="1" name=""/>
+        <p:cNvGrpSpPr/>
+        <p:nvPr/>
+      </p:nvGrpSpPr>
+      <p:grpSpPr>
+        <a:xfrm>
+          <a:off x="0" y="0"/>
+          <a:ext cx="0" cy="0"/>
+          <a:chOff x="0" y="0"/>
+          <a:chExt cx="0" cy="0"/>
+        </a:xfrm>
+      </p:grpSpPr>
+      <p:sp>
+        <p:nvSpPr>
+          <p:cNvPr id="2" name="Slide Image Placeholder 1"/>
+          <p:cNvSpPr>
+            <a:spLocks noGrp="1" noRot="1" noChangeAspect="1"/>
+          </p:cNvSpPr>
+          <p:nvPr>
+            <p:ph type="sldImg"/>
+          </p:nvPr>
+        </p:nvSpPr>
+        <p:spPr/>
+      </p:sp>
+      <p:sp>
+        <p:nvSpPr>
+          <p:cNvPr id="3" name="Notes Placeholder 2"/>
+          <p:cNvSpPr>
+            <a:spLocks noGrp="1"/>
+          </p:cNvSpPr>
+          <p:nvPr>
+            <p:ph type="body" idx="1"/>
+          </p:nvPr>
+        </p:nvSpPr>
+        <p:spPr/>
+        <p:txBody>
+          <a:bodyPr/>
+          <a:lstStyle/>
+          <a:p>
+            <a:endParaRPr lang="en-IN" dirty="0"/>
+          </a:p>
+        </p:txBody>
+      </p:sp>
+      <p:sp>
+        <p:nvSpPr>
+          <p:cNvPr id="4" name="Slide Number Placeholder 3"/>
+          <p:cNvSpPr>
+            <a:spLocks noGrp="1"/>
+          </p:cNvSpPr>
+          <p:nvPr>
+            <p:ph type="sldNum" sz="quarter" idx="5"/>
+          </p:nvPr>
+        </p:nvSpPr>
+        <p:spPr/>
+        <p:txBody>
+          <a:bodyPr/>
+          <a:lstStyle/>
+          <a:p>
+            <a:fld id="{BDCA7DDB-EEC3-E14D-8139-D0C29FBA1B32}" type="slidenum">
+              <a:rPr lang="en-US" smtClean="0"/>
+              <a:t>5</a:t>
+            </a:fld>
+            <a:endParaRPr lang="en-US"/>
+          </a:p>
+        </p:txBody>
+      </p:sp>
+    </p:spTree>
+    <p:extLst>
+      <p:ext uri="{BB962C8B-B14F-4D97-AF65-F5344CB8AC3E}">
+        <p14:creationId xmlns:p14="http://schemas.microsoft.com/office/powerpoint/2010/main" val="3370783403"/>
+      </p:ext>
+    </p:extLst>
+  </p:cSld>
+  <p:clrMapOvr>
+    <a:masterClrMapping/>
+  </p:clrMapOvr>
+</p:notes>
+</file>
+
+<file path=ppt/notesSlides/notesSlide2.xml><?xml version="1.0" encoding="utf-8"?>
+<p:notes xmlns:a="http://schemas.openxmlformats.org/drawingml/2006/main" xmlns:r="http://schemas.openxmlformats.org/officeDocument/2006/relationships" xmlns:p="http://schemas.openxmlformats.org/presentationml/2006/main">
+  <p:cSld>
+    <p:spTree>
+      <p:nvGrpSpPr>
+        <p:cNvPr id="1" name=""/>
+        <p:cNvGrpSpPr/>
+        <p:nvPr/>
+      </p:nvGrpSpPr>
+      <p:grpSpPr>
+        <a:xfrm>
+          <a:off x="0" y="0"/>
+          <a:ext cx="0" cy="0"/>
+          <a:chOff x="0" y="0"/>
+          <a:chExt cx="0" cy="0"/>
+        </a:xfrm>
+      </p:grpSpPr>
+      <p:sp>
+        <p:nvSpPr>
+          <p:cNvPr id="2" name="Slide Image Placeholder 1"/>
+          <p:cNvSpPr>
+            <a:spLocks noGrp="1" noRot="1" noChangeAspect="1"/>
+          </p:cNvSpPr>
+          <p:nvPr>
+            <p:ph type="sldImg"/>
+          </p:nvPr>
+        </p:nvSpPr>
+        <p:spPr/>
+      </p:sp>
+      <p:sp>
+        <p:nvSpPr>
+          <p:cNvPr id="3" name="Notes Placeholder 2"/>
+          <p:cNvSpPr>
+            <a:spLocks noGrp="1"/>
+          </p:cNvSpPr>
+          <p:nvPr>
+            <p:ph type="body" idx="1"/>
+          </p:nvPr>
+        </p:nvSpPr>
+        <p:spPr/>
+        <p:txBody>
+          <a:bodyPr/>
+          <a:lstStyle/>
+          <a:p>
+            <a:endParaRPr lang="en-IN" dirty="0"/>
+          </a:p>
+        </p:txBody>
+      </p:sp>
+      <p:sp>
+        <p:nvSpPr>
+          <p:cNvPr id="4" name="Slide Number Placeholder 3"/>
+          <p:cNvSpPr>
+            <a:spLocks noGrp="1"/>
+          </p:cNvSpPr>
+          <p:nvPr>
+            <p:ph type="sldNum" sz="quarter" idx="5"/>
+          </p:nvPr>
+        </p:nvSpPr>
+        <p:spPr/>
+        <p:txBody>
+          <a:bodyPr/>
+          <a:lstStyle/>
+          <a:p>
+            <a:fld id="{BDCA7DDB-EEC3-E14D-8139-D0C29FBA1B32}" type="slidenum">
+              <a:rPr lang="en-US" smtClean="0"/>
+              <a:t>6</a:t>
+            </a:fld>
+            <a:endParaRPr lang="en-US"/>
+          </a:p>
+        </p:txBody>
+      </p:sp>
+    </p:spTree>
+    <p:extLst>
+      <p:ext uri="{BB962C8B-B14F-4D97-AF65-F5344CB8AC3E}">
+        <p14:creationId xmlns:p14="http://schemas.microsoft.com/office/powerpoint/2010/main" val="4019126210"/>
+      </p:ext>
+    </p:extLst>
+  </p:cSld>
+  <p:clrMapOvr>
+    <a:masterClrMapping/>
+  </p:clrMapOvr>
+</p:notes>
+</file>
+
+<file path=ppt/notesSlides/notesSlide3.xml><?xml version="1.0" encoding="utf-8"?>
+<p:notes xmlns:a="http://schemas.openxmlformats.org/drawingml/2006/main" xmlns:r="http://schemas.openxmlformats.org/officeDocument/2006/relationships" xmlns:p="http://schemas.openxmlformats.org/presentationml/2006/main">
+  <p:cSld>
+    <p:spTree>
+      <p:nvGrpSpPr>
+        <p:cNvPr id="1" name=""/>
+        <p:cNvGrpSpPr/>
+        <p:nvPr/>
+      </p:nvGrpSpPr>
+      <p:grpSpPr>
+        <a:xfrm>
+          <a:off x="0" y="0"/>
+          <a:ext cx="0" cy="0"/>
+          <a:chOff x="0" y="0"/>
+          <a:chExt cx="0" cy="0"/>
+        </a:xfrm>
+      </p:grpSpPr>
+      <p:sp>
+        <p:nvSpPr>
+          <p:cNvPr id="2" name="Slide Image Placeholder 1"/>
+          <p:cNvSpPr>
+            <a:spLocks noGrp="1" noRot="1" noChangeAspect="1"/>
+          </p:cNvSpPr>
+          <p:nvPr>
+            <p:ph type="sldImg"/>
+          </p:nvPr>
+        </p:nvSpPr>
+        <p:spPr/>
+      </p:sp>
+      <p:sp>
+        <p:nvSpPr>
+          <p:cNvPr id="3" name="Notes Placeholder 2"/>
+          <p:cNvSpPr>
+            <a:spLocks noGrp="1"/>
+          </p:cNvSpPr>
+          <p:nvPr>
+            <p:ph type="body" idx="1"/>
+          </p:nvPr>
+        </p:nvSpPr>
+        <p:spPr/>
+        <p:txBody>
+          <a:bodyPr/>
+          <a:lstStyle/>
+          <a:p>
+            <a:endParaRPr lang="en-IN" dirty="0"/>
+          </a:p>
+        </p:txBody>
+      </p:sp>
+      <p:sp>
+        <p:nvSpPr>
+          <p:cNvPr id="4" name="Slide Number Placeholder 3"/>
+          <p:cNvSpPr>
+            <a:spLocks noGrp="1"/>
+          </p:cNvSpPr>
+          <p:nvPr>
+            <p:ph type="sldNum" sz="quarter" idx="5"/>
+          </p:nvPr>
+        </p:nvSpPr>
+        <p:spPr/>
+        <p:txBody>
+          <a:bodyPr/>
+          <a:lstStyle/>
+          <a:p>
+            <a:fld id="{BDCA7DDB-EEC3-E14D-8139-D0C29FBA1B32}" type="slidenum">
+              <a:rPr lang="en-US" smtClean="0"/>
+              <a:t>9</a:t>
+            </a:fld>
+            <a:endParaRPr lang="en-US"/>
+          </a:p>
+        </p:txBody>
+      </p:sp>
+    </p:spTree>
+    <p:extLst>
+      <p:ext uri="{BB962C8B-B14F-4D97-AF65-F5344CB8AC3E}">
+        <p14:creationId xmlns:p14="http://schemas.microsoft.com/office/powerpoint/2010/main" val="3061889013"/>
+      </p:ext>
+    </p:extLst>
+  </p:cSld>
+  <p:clrMapOvr>
+    <a:masterClrMapping/>
+  </p:clrMapOvr>
+</p:notes>
 </file>
 
 <file path=ppt/slideLayouts/slideLayout1.xml><?xml version="1.0" encoding="utf-8"?>
@@ -3804,8 +4056,8 @@
         </p:nvSpPr>
         <p:spPr>
           <a:xfrm>
-            <a:off x="1154955" y="573157"/>
-            <a:ext cx="8825658" cy="3329581"/>
+            <a:off x="664464" y="573157"/>
+            <a:ext cx="10863072" cy="2700395"/>
           </a:xfrm>
         </p:spPr>
         <p:txBody>
@@ -3814,7 +4066,21 @@
           <a:p>
             <a:r>
               <a:rPr lang="en-US" sz="3200" b="1" dirty="0"/>
-              <a:t>Automated Pneumonia and COVID-19 Detection from Chest X-Ray Images</a:t>
+              <a:t>Automated </a:t>
+            </a:r>
+            <a:br>
+              <a:rPr lang="en-US" sz="3200" b="1" dirty="0"/>
+            </a:br>
+            <a:r>
+              <a:rPr lang="en-US" sz="3200" b="1" dirty="0"/>
+              <a:t>Pneumonia and COVID-19 Detection </a:t>
+            </a:r>
+            <a:br>
+              <a:rPr lang="en-US" sz="3200" b="1" dirty="0"/>
+            </a:br>
+            <a:r>
+              <a:rPr lang="en-US" sz="3200" b="1" dirty="0"/>
+              <a:t>from Chest X-Ray Images</a:t>
             </a:r>
             <a:endParaRPr sz="3200" b="1" dirty="0"/>
           </a:p>
@@ -3838,7 +4104,7 @@
         </p:nvSpPr>
         <p:spPr>
           <a:xfrm>
-            <a:off x="1154955" y="4061763"/>
+            <a:off x="1683171" y="4189779"/>
             <a:ext cx="8825658" cy="861420"/>
           </a:xfrm>
         </p:spPr>
@@ -3850,28 +4116,36 @@
           <a:p>
             <a:pPr algn="ctr"/>
             <a:r>
-              <a:rPr sz="2000" b="1"/>
+              <a:rPr sz="2000" b="1" dirty="0"/>
               <a:t>Rajib Roy</a:t>
             </a:r>
           </a:p>
           <a:p>
             <a:pPr algn="ctr"/>
             <a:r>
-              <a:rPr sz="1600" b="0"/>
+              <a:rPr lang="en-US" sz="1600" dirty="0" err="1"/>
+              <a:t>M.Tech</a:t>
+            </a:r>
+            <a:r>
+              <a:rPr lang="en-US" sz="1600" dirty="0"/>
+              <a:t>. (AI)  |  </a:t>
+            </a:r>
+            <a:r>
+              <a:rPr sz="1600" b="0" dirty="0"/>
               <a:t>SR No: 24459  |  IISc Bengaluru</a:t>
             </a:r>
           </a:p>
           <a:p>
             <a:pPr algn="ctr"/>
             <a:r>
-              <a:rPr sz="1600" b="0"/>
+              <a:rPr sz="1600" b="0" dirty="0"/>
               <a:t>DS 216o: Applied AI in Healthcare</a:t>
             </a:r>
           </a:p>
           <a:p>
             <a:pPr algn="ctr"/>
             <a:r>
-              <a:rPr sz="1400" b="0"/>
+              <a:rPr sz="1400" b="0" dirty="0"/>
               <a:t>April 2026</a:t>
             </a:r>
           </a:p>
@@ -3923,7 +4197,12 @@
             <p:ph type="title"/>
           </p:nvPr>
         </p:nvSpPr>
-        <p:spPr/>
+        <p:spPr>
+          <a:xfrm>
+            <a:off x="283464" y="365125"/>
+            <a:ext cx="11070336" cy="1325563"/>
+          </a:xfrm>
+        </p:spPr>
         <p:txBody>
           <a:bodyPr>
             <a:normAutofit/>
@@ -3931,7 +4210,7 @@
           <a:lstStyle/>
           <a:p>
             <a:r>
-              <a:rPr sz="2600" b="1"/>
+              <a:rPr sz="2600" b="1" dirty="0"/>
               <a:t>PROBLEM STATEMENT</a:t>
             </a:r>
           </a:p>
@@ -3961,7 +4240,7 @@
           <a:p>
             <a:pPr algn="l"/>
             <a:r>
-              <a:rPr sz="1700" b="1">
+              <a:rPr sz="1700" b="1" dirty="0">
                 <a:solidFill>
                   <a:srgbClr val="1F4E79"/>
                 </a:solidFill>
@@ -3972,14 +4251,14 @@
           <a:p>
             <a:pPr algn="l"/>
             <a:r>
-              <a:rPr sz="1400" b="0"/>
+              <a:rPr sz="1400" b="0" dirty="0"/>
               <a:t>  •  3-class chest X-ray classification: Normal / Pneumonia / COVID-19</a:t>
             </a:r>
           </a:p>
           <a:p>
             <a:pPr algn="l"/>
             <a:r>
-              <a:rPr sz="1400" b="0"/>
+              <a:rPr sz="1400" b="0" dirty="0"/>
               <a:t>  •  Enable automated, scalable screening to assist radiologists</a:t>
             </a:r>
           </a:p>
@@ -3990,7 +4269,7 @@
               </a:spcBef>
             </a:pPr>
             <a:r>
-              <a:rPr sz="1700" b="1">
+              <a:rPr sz="1700" b="1" dirty="0">
                 <a:solidFill>
                   <a:srgbClr val="1F4E79"/>
                 </a:solidFill>
@@ -4001,22 +4280,30 @@
           <a:p>
             <a:pPr algn="l"/>
             <a:r>
-              <a:rPr sz="1400" b="0"/>
+              <a:rPr sz="1400" b="0" dirty="0"/>
               <a:t>  •  Uncertainty quantification (MC Dropout) — auto-refer low-confidence cases</a:t>
             </a:r>
           </a:p>
           <a:p>
             <a:pPr algn="l"/>
             <a:r>
-              <a:rPr sz="1400" b="0"/>
+              <a:rPr sz="1400" b="0" dirty="0"/>
               <a:t>  •  Visual explainability via Grad-CAM heat-maps on each model</a:t>
             </a:r>
           </a:p>
           <a:p>
             <a:pPr algn="l"/>
             <a:r>
-              <a:rPr sz="1400" b="0"/>
-              <a:t>  •  Deployment as interactive Streamlit web application</a:t>
+              <a:rPr sz="1400" b="0" dirty="0"/>
+              <a:t>  •  Deployment as interactive </a:t>
+            </a:r>
+            <a:r>
+              <a:rPr sz="1400" b="0" dirty="0" err="1"/>
+              <a:t>Streamlit</a:t>
+            </a:r>
+            <a:r>
+              <a:rPr sz="1400" b="0" dirty="0"/>
+              <a:t> web application</a:t>
             </a:r>
           </a:p>
           <a:p>
@@ -4026,7 +4313,7 @@
               </a:spcBef>
             </a:pPr>
             <a:r>
-              <a:rPr sz="1700" b="1">
+              <a:rPr sz="1700" b="1" dirty="0">
                 <a:solidFill>
                   <a:srgbClr val="1F4E79"/>
                 </a:solidFill>
@@ -4037,28 +4324,28 @@
           <a:p>
             <a:pPr algn="l"/>
             <a:r>
-              <a:rPr sz="1400" b="0"/>
+              <a:rPr sz="1400" b="0" dirty="0"/>
               <a:t>  •  Class imbalance — COVID accounts for only ~13.4% of data</a:t>
             </a:r>
           </a:p>
           <a:p>
             <a:pPr algn="l"/>
             <a:r>
-              <a:rPr sz="1400" b="0"/>
+              <a:rPr sz="1400" b="0" dirty="0"/>
               <a:t>  •  Multi-source datasets requiring unified label mapping and deduplication</a:t>
             </a:r>
           </a:p>
           <a:p>
             <a:pPr algn="l"/>
             <a:r>
-              <a:rPr sz="1400" b="0"/>
+              <a:rPr sz="1400" b="0" dirty="0"/>
               <a:t>  •  Clinical interpretability: model decisions must be explainable</a:t>
             </a:r>
           </a:p>
           <a:p>
             <a:pPr algn="l"/>
             <a:r>
-              <a:rPr sz="1400" b="0"/>
+              <a:rPr sz="1400" b="0" dirty="0"/>
               <a:t>  •  Uncertainty must be communicated to avoid confident wrong predictions</a:t>
             </a:r>
           </a:p>
@@ -4110,16 +4397,21 @@
             <p:ph type="title"/>
           </p:nvPr>
         </p:nvSpPr>
-        <p:spPr/>
+        <p:spPr>
+          <a:xfrm>
+            <a:off x="246888" y="365125"/>
+            <a:ext cx="11106912" cy="1325563"/>
+          </a:xfrm>
+        </p:spPr>
         <p:txBody>
           <a:bodyPr/>
           <a:lstStyle/>
           <a:p>
             <a:r>
-              <a:rPr sz="2600" b="1"/>
+              <a:rPr sz="2600" b="1" dirty="0"/>
               <a:t>METHODOLOGY</a:t>
             </a:r>
-            <a:endParaRPr lang="en-IN"/>
+            <a:endParaRPr lang="en-IN" dirty="0"/>
           </a:p>
         </p:txBody>
       </p:sp>
@@ -4132,7 +4424,7 @@
         <p:spPr>
           <a:xfrm>
             <a:off x="365760" y="1417320"/>
-            <a:ext cx="5486400" cy="5257800"/>
+            <a:ext cx="5486400" cy="4293483"/>
           </a:xfrm>
           <a:prstGeom prst="rect">
             <a:avLst/>
@@ -4147,7 +4439,7 @@
           <a:p>
             <a:pPr algn="l"/>
             <a:r>
-              <a:rPr sz="1600" b="1">
+              <a:rPr sz="1600" b="1" dirty="0">
                 <a:solidFill>
                   <a:srgbClr val="1F4E79"/>
                 </a:solidFill>
@@ -4158,30 +4450,51 @@
           <a:p>
             <a:pPr algn="l"/>
             <a:r>
-              <a:rPr sz="1300" b="0"/>
+              <a:rPr sz="1300" b="0" dirty="0"/>
               <a:t>  •  DenseNet121  —  7.2M params  —  dense skip connections</a:t>
             </a:r>
           </a:p>
           <a:p>
             <a:pPr algn="l"/>
             <a:r>
-              <a:rPr sz="1300" b="0"/>
+              <a:rPr sz="1300" b="0" dirty="0"/>
               <a:t>  •  ResNet50     —  24.0M params —  residual connections</a:t>
             </a:r>
           </a:p>
           <a:p>
             <a:pPr algn="l"/>
             <a:r>
-              <a:rPr sz="1300" b="0"/>
+              <a:rPr sz="1300" b="0" dirty="0"/>
               <a:t>  •  EfficientNetB0 — 4.3M params —  compound scaling</a:t>
             </a:r>
           </a:p>
           <a:p>
             <a:pPr algn="l"/>
             <a:r>
-              <a:rPr sz="1200" b="0"/>
-              <a:t>      –  Shared head: BN→Drop→FC(f,256)→ReLU→BN→Drop→FC(256,3)</a:t>
-            </a:r>
+              <a:rPr sz="1200" b="0" dirty="0"/>
+              <a:t>      –  Shared head: </a:t>
+            </a:r>
+            <a:r>
+              <a:rPr sz="1200" b="0" dirty="0" err="1"/>
+              <a:t>BN→Drop→FC</a:t>
+            </a:r>
+            <a:r>
+              <a:rPr sz="1200" b="0" dirty="0"/>
+              <a:t>(f,256)→</a:t>
+            </a:r>
+            <a:r>
+              <a:rPr sz="1200" b="0" dirty="0" err="1"/>
+              <a:t>ReLU→BN→Drop→FC</a:t>
+            </a:r>
+            <a:r>
+              <a:rPr sz="1200" b="0" dirty="0"/>
+              <a:t>(256,3)</a:t>
+            </a:r>
+            <a:endParaRPr lang="en-US" sz="1200" b="0" dirty="0"/>
+          </a:p>
+          <a:p>
+            <a:pPr algn="l"/>
+            <a:endParaRPr sz="1200" b="0" dirty="0"/>
           </a:p>
           <a:p>
             <a:pPr algn="l">
@@ -4190,7 +4503,7 @@
               </a:spcBef>
             </a:pPr>
             <a:r>
-              <a:rPr sz="1600" b="1">
+              <a:rPr sz="1600" b="1" dirty="0">
                 <a:solidFill>
                   <a:srgbClr val="1F4E79"/>
                 </a:solidFill>
@@ -4201,23 +4514,64 @@
           <a:p>
             <a:pPr algn="l"/>
             <a:r>
-              <a:rPr sz="1300" b="0"/>
-              <a:t>  •  Phase 1 (5 ep, lr=1e-3): frozen backbone — train head only</a:t>
+              <a:rPr sz="1300" b="0" dirty="0"/>
+              <a:t>  •  Phase 1 (5 ep, </a:t>
+            </a:r>
+            <a:r>
+              <a:rPr sz="1300" b="0" dirty="0" err="1"/>
+              <a:t>lr</a:t>
+            </a:r>
+            <a:r>
+              <a:rPr sz="1300" b="0" dirty="0"/>
+              <a:t>=1e-3): frozen backbone — train head only</a:t>
             </a:r>
           </a:p>
           <a:p>
             <a:pPr algn="l"/>
             <a:r>
-              <a:rPr sz="1300" b="0"/>
-              <a:t>  •  Phase 2 (≤20 ep, lr=1e-5): unfreeze last block + joint fine-tuning</a:t>
+              <a:rPr sz="1300" b="0" dirty="0"/>
+              <a:t>  •  Phase 2 (≤20 ep, </a:t>
+            </a:r>
+            <a:r>
+              <a:rPr sz="1300" b="0" dirty="0" err="1"/>
+              <a:t>lr</a:t>
+            </a:r>
+            <a:r>
+              <a:rPr sz="1300" b="0" dirty="0"/>
+              <a:t>=1e-5): unfreeze last block + joint fine-tuning</a:t>
             </a:r>
           </a:p>
           <a:p>
             <a:pPr algn="l"/>
             <a:r>
-              <a:rPr sz="1200" b="0"/>
-              <a:t>      –  EarlyStopping (patience=5), ReduceLROnPlateau, ModelCheckpoint</a:t>
-            </a:r>
+              <a:rPr sz="1200" b="0" dirty="0"/>
+              <a:t>      –  </a:t>
+            </a:r>
+            <a:r>
+              <a:rPr sz="1200" b="0" dirty="0" err="1"/>
+              <a:t>EarlyStopping</a:t>
+            </a:r>
+            <a:r>
+              <a:rPr sz="1200" b="0" dirty="0"/>
+              <a:t> (patience=5), </a:t>
+            </a:r>
+            <a:r>
+              <a:rPr sz="1200" b="0" dirty="0" err="1"/>
+              <a:t>ReduceLROnPlateau</a:t>
+            </a:r>
+            <a:r>
+              <a:rPr sz="1200" b="0" dirty="0"/>
+              <a:t>, </a:t>
+            </a:r>
+            <a:r>
+              <a:rPr sz="1200" b="0" dirty="0" err="1"/>
+              <a:t>ModelCheckpoint</a:t>
+            </a:r>
+            <a:endParaRPr lang="en-US" sz="1200" b="0" dirty="0"/>
+          </a:p>
+          <a:p>
+            <a:pPr algn="l"/>
+            <a:endParaRPr sz="1200" b="0" dirty="0"/>
           </a:p>
           <a:p>
             <a:pPr algn="l">
@@ -4226,7 +4580,7 @@
               </a:spcBef>
             </a:pPr>
             <a:r>
-              <a:rPr sz="1600" b="1">
+              <a:rPr sz="1600" b="1" dirty="0">
                 <a:solidFill>
                   <a:srgbClr val="1F4E79"/>
                 </a:solidFill>
@@ -4237,16 +4591,21 @@
           <a:p>
             <a:pPr algn="l"/>
             <a:r>
-              <a:rPr sz="1300" b="0"/>
+              <a:rPr sz="1300" b="0" dirty="0"/>
               <a:t>  •  Focal Loss (γ=2, α=0.25) + inverse-frequency class weights</a:t>
             </a:r>
           </a:p>
           <a:p>
             <a:pPr algn="l"/>
             <a:r>
-              <a:rPr sz="1200" b="0"/>
+              <a:rPr sz="1200" b="0" dirty="0"/>
               <a:t>      –  COVID weight = 2.49×  (vs Normal=0.77, Pneumonia=0.77)</a:t>
             </a:r>
+            <a:endParaRPr lang="en-US" sz="1200" b="0" dirty="0"/>
+          </a:p>
+          <a:p>
+            <a:pPr algn="l"/>
+            <a:endParaRPr sz="1200" b="0" dirty="0"/>
           </a:p>
           <a:p>
             <a:pPr algn="l">
@@ -4255,7 +4614,7 @@
               </a:spcBef>
             </a:pPr>
             <a:r>
-              <a:rPr sz="1600" b="1">
+              <a:rPr sz="1600" b="1" dirty="0">
                 <a:solidFill>
                   <a:srgbClr val="1F4E79"/>
                 </a:solidFill>
@@ -4266,21 +4625,21 @@
           <a:p>
             <a:pPr algn="l"/>
             <a:r>
-              <a:rPr sz="1300" b="0"/>
+              <a:rPr sz="1300" b="0" dirty="0"/>
               <a:t>  •  AUC-weighted soft voting across all 3 models</a:t>
             </a:r>
           </a:p>
           <a:p>
             <a:pPr algn="l"/>
             <a:r>
-              <a:rPr sz="1300" b="0"/>
+              <a:rPr sz="1300" b="0" dirty="0"/>
               <a:t>  •  MC Dropout (50 passes): refer if combined uncertainty &gt; 0.35</a:t>
             </a:r>
           </a:p>
           <a:p>
             <a:pPr algn="l"/>
             <a:r>
-              <a:rPr sz="1300" b="0"/>
+              <a:rPr sz="1300" b="0" dirty="0"/>
               <a:t>  •  Grad-CAM on last conv block — heat-maps overlaid on CXR</a:t>
             </a:r>
           </a:p>
@@ -4295,7 +4654,7 @@
         <p:spPr>
           <a:xfrm>
             <a:off x="6035040" y="1417320"/>
-            <a:ext cx="5486400" cy="5257800"/>
+            <a:ext cx="5486400" cy="2354491"/>
           </a:xfrm>
           <a:prstGeom prst="rect">
             <a:avLst/>
@@ -4308,9 +4667,8 @@
           </a:bodyPr>
           <a:lstStyle/>
           <a:p>
-            <a:pPr algn="ctr"/>
-            <a:r>
-              <a:rPr sz="1500" b="1">
+            <a:r>
+              <a:rPr sz="1500" b="1" dirty="0">
                 <a:solidFill>
                   <a:srgbClr val="1F4E79"/>
                 </a:solidFill>
@@ -4320,7 +4678,7 @@
           </a:p>
           <a:p>
             <a:pPr algn="l"/>
-            <a:endParaRPr sz="1500" b="1">
+            <a:endParaRPr sz="1500" b="1" dirty="0">
               <a:solidFill>
                 <a:srgbClr val="1F4E79"/>
               </a:solidFill>
@@ -4329,64 +4687,85 @@
           <a:p>
             <a:pPr algn="l"/>
             <a:r>
-              <a:rPr sz="1300" b="0"/>
-              <a:t>►  Raw CXR images (Kermany + COVID-19 DB)</a:t>
+              <a:rPr sz="1300" b="0" dirty="0"/>
+              <a:t>►  Raw CXR images (</a:t>
+            </a:r>
+            <a:r>
+              <a:rPr sz="1300" b="0" dirty="0" err="1"/>
+              <a:t>Kermany</a:t>
+            </a:r>
+            <a:r>
+              <a:rPr sz="1300" b="0" dirty="0"/>
+              <a:t> + COVID-19 DB)</a:t>
             </a:r>
           </a:p>
           <a:p>
             <a:pPr algn="l"/>
             <a:r>
-              <a:rPr sz="1300" b="0"/>
+              <a:rPr sz="1300" b="0" dirty="0"/>
               <a:t>►  Unify labels → deduplicate → 80/10/10 split</a:t>
             </a:r>
           </a:p>
           <a:p>
             <a:pPr algn="l"/>
             <a:r>
-              <a:rPr sz="1300" b="0"/>
-              <a:t>►  Augmentation + ImageNet normalisation</a:t>
-            </a:r>
+              <a:rPr sz="1300" b="0" dirty="0"/>
+              <a:t>►  Augmentation + ImageNet </a:t>
+            </a:r>
+            <a:r>
+              <a:rPr sz="1300" b="0" dirty="0" err="1"/>
+              <a:t>normalisation</a:t>
+            </a:r>
+            <a:endParaRPr sz="1300" b="0" dirty="0"/>
           </a:p>
           <a:p>
             <a:pPr algn="l"/>
             <a:r>
-              <a:rPr sz="1300" b="0"/>
+              <a:rPr sz="1300" b="0" dirty="0"/>
               <a:t>►  Phase 1: train head (backbone frozen)</a:t>
             </a:r>
           </a:p>
           <a:p>
             <a:pPr algn="l"/>
             <a:r>
-              <a:rPr sz="1300" b="0"/>
+              <a:rPr sz="1300" b="0" dirty="0"/>
               <a:t>►  Phase 2: fine-tune last block + head</a:t>
             </a:r>
           </a:p>
           <a:p>
             <a:pPr algn="l"/>
             <a:r>
-              <a:rPr sz="1300" b="0"/>
+              <a:rPr sz="1300" b="0" dirty="0"/>
               <a:t>►  Ensemble: AUC-weighted soft voting</a:t>
             </a:r>
           </a:p>
           <a:p>
             <a:pPr algn="l"/>
             <a:r>
-              <a:rPr sz="1300" b="0"/>
+              <a:rPr sz="1300" b="0" dirty="0"/>
               <a:t>►  MC Dropout → uncertainty → referral flag</a:t>
             </a:r>
           </a:p>
           <a:p>
             <a:pPr algn="l"/>
             <a:r>
-              <a:rPr sz="1300" b="0"/>
+              <a:rPr sz="1300" b="0" dirty="0"/>
               <a:t>►  Grad-CAM → saliency heat-map overlay</a:t>
             </a:r>
           </a:p>
           <a:p>
             <a:pPr algn="l"/>
             <a:r>
-              <a:rPr sz="1300" b="0"/>
-              <a:t>►  Streamlit app: single &amp; batch inference</a:t>
+              <a:rPr sz="1300" b="0" dirty="0"/>
+              <a:t>►  </a:t>
+            </a:r>
+            <a:r>
+              <a:rPr sz="1300" b="0" dirty="0" err="1"/>
+              <a:t>Streamlit</a:t>
+            </a:r>
+            <a:r>
+              <a:rPr sz="1300" b="0" dirty="0"/>
+              <a:t> app: single &amp; batch inference</a:t>
             </a:r>
           </a:p>
         </p:txBody>
@@ -4437,13 +4816,18 @@
             <p:ph type="title"/>
           </p:nvPr>
         </p:nvSpPr>
-        <p:spPr/>
+        <p:spPr>
+          <a:xfrm>
+            <a:off x="256032" y="365125"/>
+            <a:ext cx="11097768" cy="1325563"/>
+          </a:xfrm>
+        </p:spPr>
         <p:txBody>
           <a:bodyPr/>
           <a:lstStyle/>
           <a:p>
             <a:r>
-              <a:rPr sz="2600" b="1"/>
+              <a:rPr sz="2600" b="1" dirty="0"/>
               <a:t>DATASET</a:t>
             </a:r>
           </a:p>
@@ -4564,7 +4948,7 @@
         </p:blipFill>
         <p:spPr>
           <a:xfrm>
-            <a:off x="1495958" y="4434840"/>
+            <a:off x="1495958" y="4133088"/>
             <a:ext cx="3204057" cy="2194560"/>
           </a:xfrm>
           <a:prstGeom prst="rect">
@@ -4580,7 +4964,7 @@
         </p:nvSpPr>
         <p:spPr>
           <a:xfrm>
-            <a:off x="1495958" y="6656832"/>
+            <a:off x="1495958" y="6409944"/>
             <a:ext cx="3204057" cy="228600"/>
           </a:xfrm>
           <a:prstGeom prst="rect">
@@ -4596,7 +4980,7 @@
           <a:p>
             <a:pPr algn="ctr"/>
             <a:r>
-              <a:rPr sz="1100" b="0">
+              <a:rPr sz="1100" b="0" dirty="0">
                 <a:solidFill>
                   <a:srgbClr val="505050"/>
                 </a:solidFill>
@@ -4622,7 +5006,7 @@
         </p:blipFill>
         <p:spPr>
           <a:xfrm>
-            <a:off x="4928616" y="4434840"/>
+            <a:off x="4928616" y="4133088"/>
             <a:ext cx="3313785" cy="2194560"/>
           </a:xfrm>
           <a:prstGeom prst="rect">
@@ -4638,7 +5022,7 @@
         </p:nvSpPr>
         <p:spPr>
           <a:xfrm>
-            <a:off x="4928616" y="6656832"/>
+            <a:off x="4928616" y="6409944"/>
             <a:ext cx="3313785" cy="228600"/>
           </a:xfrm>
           <a:prstGeom prst="rect">
@@ -4654,7 +5038,7 @@
           <a:p>
             <a:pPr algn="ctr"/>
             <a:r>
-              <a:rPr sz="1100" b="0">
+              <a:rPr sz="1100" b="0" dirty="0">
                 <a:solidFill>
                   <a:srgbClr val="505050"/>
                 </a:solidFill>
@@ -4680,7 +5064,7 @@
         </p:blipFill>
         <p:spPr>
           <a:xfrm>
-            <a:off x="8471001" y="4434840"/>
+            <a:off x="8471001" y="4133088"/>
             <a:ext cx="2194560" cy="2194560"/>
           </a:xfrm>
           <a:prstGeom prst="rect">
@@ -4696,7 +5080,7 @@
         </p:nvSpPr>
         <p:spPr>
           <a:xfrm>
-            <a:off x="8471001" y="6656832"/>
+            <a:off x="8471001" y="6409944"/>
             <a:ext cx="2194560" cy="228600"/>
           </a:xfrm>
           <a:prstGeom prst="rect">
@@ -4770,8 +5154,8 @@
         </p:nvSpPr>
         <p:spPr>
           <a:xfrm>
-            <a:off x="646111" y="452718"/>
-            <a:ext cx="9404723" cy="968119"/>
+            <a:off x="274321" y="452718"/>
+            <a:ext cx="9776514" cy="968119"/>
           </a:xfrm>
         </p:spPr>
         <p:txBody>
@@ -4779,7 +5163,7 @@
           <a:lstStyle/>
           <a:p>
             <a:r>
-              <a:rPr sz="2600" b="1"/>
+              <a:rPr sz="2600" b="1" dirty="0"/>
               <a:t>EXPERIMENTS</a:t>
             </a:r>
           </a:p>
@@ -4878,15 +5262,15 @@
           <p:nvPr/>
         </p:nvPicPr>
         <p:blipFill>
-          <a:blip r:embed="rId2"/>
+          <a:blip r:embed="rId3"/>
           <a:stretch>
             <a:fillRect/>
           </a:stretch>
         </p:blipFill>
         <p:spPr>
           <a:xfrm>
-            <a:off x="594360" y="3703320"/>
-            <a:ext cx="10972800" cy="3850105"/>
+            <a:off x="1499616" y="3321036"/>
+            <a:ext cx="9482328" cy="3327133"/>
           </a:xfrm>
           <a:prstGeom prst="rect">
             <a:avLst/>
@@ -4973,13 +5357,18 @@
             <p:ph type="title"/>
           </p:nvPr>
         </p:nvSpPr>
-        <p:spPr/>
+        <p:spPr>
+          <a:xfrm>
+            <a:off x="301752" y="365125"/>
+            <a:ext cx="11052048" cy="1325563"/>
+          </a:xfrm>
+        </p:spPr>
         <p:txBody>
           <a:bodyPr/>
           <a:lstStyle/>
           <a:p>
             <a:r>
-              <a:rPr sz="2600" b="1"/>
+              <a:rPr sz="2600" b="1" dirty="0"/>
               <a:t>RESULTS WITH VISUAL OUTPUTS</a:t>
             </a:r>
           </a:p>
@@ -4991,11 +5380,17 @@
           <p:cNvGraphicFramePr>
             <a:graphicFrameLocks noGrp="1"/>
           </p:cNvGraphicFramePr>
-          <p:nvPr/>
+          <p:nvPr>
+            <p:extLst>
+              <p:ext uri="{D42A27DB-BD31-4B8C-83A1-F6EECF244321}">
+                <p14:modId xmlns:p14="http://schemas.microsoft.com/office/powerpoint/2010/main" val="375015991"/>
+              </p:ext>
+            </p:extLst>
+          </p:nvPr>
         </p:nvGraphicFramePr>
         <p:xfrm>
-          <a:off x="365760" y="1417320"/>
-          <a:ext cx="11429996" cy="2423160"/>
+          <a:off x="487680" y="1417320"/>
+          <a:ext cx="11216640" cy="2011680"/>
         </p:xfrm>
         <a:graphic>
           <a:graphicData uri="http://schemas.openxmlformats.org/drawingml/2006/table">
@@ -5004,35 +5399,35 @@
                 <a:tableStyleId>{5C22544A-7EE6-4342-B048-85BDC9FD1C3A}</a:tableStyleId>
               </a:tblPr>
               <a:tblGrid>
-                <a:gridCol w="3117272">
+                <a:gridCol w="3059084">
                   <a:extLst>
                     <a:ext uri="{9D8B030D-6E8A-4147-A177-3AD203B41FA5}">
                       <a16:colId xmlns:a16="http://schemas.microsoft.com/office/drawing/2014/main" val="20000"/>
                     </a:ext>
                   </a:extLst>
                 </a:gridCol>
-                <a:gridCol w="2078181">
+                <a:gridCol w="2039389">
                   <a:extLst>
                     <a:ext uri="{9D8B030D-6E8A-4147-A177-3AD203B41FA5}">
                       <a16:colId xmlns:a16="http://schemas.microsoft.com/office/drawing/2014/main" val="20001"/>
                     </a:ext>
                   </a:extLst>
                 </a:gridCol>
-                <a:gridCol w="2078181">
+                <a:gridCol w="2039389">
                   <a:extLst>
                     <a:ext uri="{9D8B030D-6E8A-4147-A177-3AD203B41FA5}">
                       <a16:colId xmlns:a16="http://schemas.microsoft.com/office/drawing/2014/main" val="20002"/>
                     </a:ext>
                   </a:extLst>
                 </a:gridCol>
-                <a:gridCol w="2078181">
+                <a:gridCol w="2039389">
                   <a:extLst>
                     <a:ext uri="{9D8B030D-6E8A-4147-A177-3AD203B41FA5}">
                       <a16:colId xmlns:a16="http://schemas.microsoft.com/office/drawing/2014/main" val="20003"/>
                     </a:ext>
                   </a:extLst>
                 </a:gridCol>
-                <a:gridCol w="2078181">
+                <a:gridCol w="2039389">
                   <a:extLst>
                     <a:ext uri="{9D8B030D-6E8A-4147-A177-3AD203B41FA5}">
                       <a16:colId xmlns:a16="http://schemas.microsoft.com/office/drawing/2014/main" val="20004"/>
@@ -5040,7 +5435,7 @@
                   </a:extLst>
                 </a:gridCol>
               </a:tblGrid>
-              <a:tr h="484632">
+              <a:tr h="402336">
                 <a:tc>
                   <a:txBody>
                     <a:bodyPr/>
@@ -5157,7 +5552,7 @@
                   </a:ext>
                 </a:extLst>
               </a:tr>
-              <a:tr h="484632">
+              <a:tr h="402336">
                 <a:tc>
                   <a:txBody>
                     <a:bodyPr/>
@@ -5165,7 +5560,7 @@
                     <a:p>
                       <a:pPr algn="l"/>
                       <a:r>
-                        <a:rPr sz="1200" b="0">
+                        <a:rPr sz="1200" b="0" dirty="0">
                           <a:solidFill>
                             <a:srgbClr val="1E1E1E"/>
                           </a:solidFill>
@@ -5274,7 +5669,7 @@
                   </a:ext>
                 </a:extLst>
               </a:tr>
-              <a:tr h="484632">
+              <a:tr h="402336">
                 <a:tc>
                   <a:txBody>
                     <a:bodyPr/>
@@ -5391,7 +5786,7 @@
                   </a:ext>
                 </a:extLst>
               </a:tr>
-              <a:tr h="484632">
+              <a:tr h="402336">
                 <a:tc>
                   <a:txBody>
                     <a:bodyPr/>
@@ -5508,7 +5903,7 @@
                   </a:ext>
                 </a:extLst>
               </a:tr>
-              <a:tr h="484632">
+              <a:tr h="402336">
                 <a:tc>
                   <a:txBody>
                     <a:bodyPr/>
@@ -5604,7 +5999,7 @@
                     <a:p>
                       <a:pPr algn="ctr"/>
                       <a:r>
-                        <a:rPr sz="1200" b="1">
+                        <a:rPr sz="1200" b="1" dirty="0">
                           <a:solidFill>
                             <a:srgbClr val="1E1E1E"/>
                           </a:solidFill>
@@ -5637,7 +6032,7 @@
         </p:nvSpPr>
         <p:spPr>
           <a:xfrm>
-            <a:off x="365760" y="3913632"/>
+            <a:off x="381000" y="3566160"/>
             <a:ext cx="11430000" cy="320040"/>
           </a:xfrm>
           <a:prstGeom prst="rect">
@@ -5653,7 +6048,7 @@
           <a:p>
             <a:pPr algn="l"/>
             <a:r>
-              <a:rPr sz="1300" b="1">
+              <a:rPr sz="1300" b="1" dirty="0">
                 <a:solidFill>
                   <a:srgbClr val="1F4E79"/>
                 </a:solidFill>
@@ -5672,14 +6067,14 @@
           <p:nvPr/>
         </p:nvPicPr>
         <p:blipFill>
-          <a:blip r:embed="rId2"/>
+          <a:blip r:embed="rId3"/>
           <a:stretch>
             <a:fillRect/>
           </a:stretch>
         </p:blipFill>
         <p:spPr>
           <a:xfrm>
-            <a:off x="594360" y="4343400"/>
+            <a:off x="594360" y="3886200"/>
             <a:ext cx="10972800" cy="2499498"/>
           </a:xfrm>
           <a:prstGeom prst="rect">
@@ -5695,7 +6090,7 @@
         </p:nvSpPr>
         <p:spPr>
           <a:xfrm>
-            <a:off x="365760" y="6870330"/>
+            <a:off x="381000" y="6492875"/>
             <a:ext cx="11430000" cy="228600"/>
           </a:xfrm>
           <a:prstGeom prst="rect">
@@ -5767,74 +6162,21 @@
             <p:ph type="title"/>
           </p:nvPr>
         </p:nvSpPr>
-        <p:spPr/>
+        <p:spPr>
+          <a:xfrm>
+            <a:off x="283464" y="365125"/>
+            <a:ext cx="11070336" cy="1325563"/>
+          </a:xfrm>
+        </p:spPr>
         <p:txBody>
           <a:bodyPr/>
           <a:lstStyle/>
           <a:p>
             <a:r>
-              <a:rPr sz="2600" b="1"/>
+              <a:rPr sz="2600" b="1" dirty="0"/>
               <a:t>VISUAL ANALYSIS — CALIBRATION &amp; EXPLAINABILITY</a:t>
             </a:r>
-            <a:endParaRPr lang="en-US"/>
-          </a:p>
-        </p:txBody>
-      </p:sp>
-      <p:pic>
-        <p:nvPicPr>
-          <p:cNvPr id="3" name="Picture 2" descr="training_curves.png"/>
-          <p:cNvPicPr>
-            <a:picLocks noChangeAspect="1"/>
-          </p:cNvPicPr>
-          <p:nvPr/>
-        </p:nvPicPr>
-        <p:blipFill>
-          <a:blip r:embed="rId2"/>
-          <a:stretch>
-            <a:fillRect/>
-          </a:stretch>
-        </p:blipFill>
-        <p:spPr>
-          <a:xfrm>
-            <a:off x="365760" y="1417320"/>
-            <a:ext cx="5486400" cy="2240280"/>
-          </a:xfrm>
-          <a:prstGeom prst="rect">
-            <a:avLst/>
-          </a:prstGeom>
-        </p:spPr>
-      </p:pic>
-      <p:sp>
-        <p:nvSpPr>
-          <p:cNvPr id="4" name="TextBox 3"/>
-          <p:cNvSpPr txBox="1"/>
-          <p:nvPr/>
-        </p:nvSpPr>
-        <p:spPr>
-          <a:xfrm>
-            <a:off x="365760" y="3675887"/>
-            <a:ext cx="5486400" cy="228600"/>
-          </a:xfrm>
-          <a:prstGeom prst="rect">
-            <a:avLst/>
-          </a:prstGeom>
-          <a:noFill/>
-        </p:spPr>
-        <p:txBody>
-          <a:bodyPr wrap="square">
-            <a:spAutoFit/>
-          </a:bodyPr>
-          <a:lstStyle/>
-          <a:p>
-            <a:pPr algn="ctr"/>
-            <a:r>
-              <a:rPr sz="1000" b="0">
-                <a:solidFill>
-                  <a:srgbClr val="505050"/>
-                </a:solidFill>
-              </a:rPr>
-              <a:t>Training &amp; Validation Curves (Loss / Accuracy)</a:t>
-            </a:r>
+            <a:endParaRPr lang="en-US" dirty="0"/>
           </a:p>
         </p:txBody>
       </p:sp>
@@ -5847,7 +6189,7 @@
           <p:nvPr/>
         </p:nvPicPr>
         <p:blipFill>
-          <a:blip r:embed="rId3"/>
+          <a:blip r:embed="rId2"/>
           <a:stretch>
             <a:fillRect/>
           </a:stretch>
@@ -5905,14 +6247,14 @@
           <p:nvPr/>
         </p:nvPicPr>
         <p:blipFill>
-          <a:blip r:embed="rId4"/>
+          <a:blip r:embed="rId3"/>
           <a:stretch>
             <a:fillRect/>
           </a:stretch>
         </p:blipFill>
         <p:spPr>
           <a:xfrm>
-            <a:off x="365760" y="3977639"/>
+            <a:off x="685800" y="1417319"/>
             <a:ext cx="5486400" cy="2240280"/>
           </a:xfrm>
           <a:prstGeom prst="rect">
@@ -5928,7 +6270,7 @@
         </p:nvSpPr>
         <p:spPr>
           <a:xfrm>
-            <a:off x="365760" y="6236207"/>
+            <a:off x="332232" y="3675887"/>
             <a:ext cx="5486400" cy="228600"/>
           </a:xfrm>
           <a:prstGeom prst="rect">
@@ -5944,7 +6286,7 @@
           <a:p>
             <a:pPr algn="ctr"/>
             <a:r>
-              <a:rPr sz="1000" b="0">
+              <a:rPr sz="1000" b="0" dirty="0">
                 <a:solidFill>
                   <a:srgbClr val="505050"/>
                 </a:solidFill>
@@ -5963,14 +6305,14 @@
           <p:nvPr/>
         </p:nvPicPr>
         <p:blipFill>
-          <a:blip r:embed="rId5"/>
+          <a:blip r:embed="rId4"/>
           <a:stretch>
             <a:fillRect/>
           </a:stretch>
         </p:blipFill>
         <p:spPr>
           <a:xfrm>
-            <a:off x="6172200" y="3977639"/>
+            <a:off x="3352800" y="4069079"/>
             <a:ext cx="5486400" cy="2240280"/>
           </a:xfrm>
           <a:prstGeom prst="rect">
@@ -5986,7 +6328,7 @@
         </p:nvSpPr>
         <p:spPr>
           <a:xfrm>
-            <a:off x="6172200" y="6236207"/>
+            <a:off x="3352800" y="6383147"/>
             <a:ext cx="5486400" cy="228600"/>
           </a:xfrm>
           <a:prstGeom prst="rect">
@@ -6002,7 +6344,7 @@
           <a:p>
             <a:pPr algn="ctr"/>
             <a:r>
-              <a:rPr sz="1000" b="0">
+              <a:rPr sz="1000" b="0" dirty="0">
                 <a:solidFill>
                   <a:srgbClr val="505050"/>
                 </a:solidFill>
@@ -6058,13 +6400,18 @@
             <p:ph type="title"/>
           </p:nvPr>
         </p:nvSpPr>
-        <p:spPr/>
+        <p:spPr>
+          <a:xfrm>
+            <a:off x="246888" y="365125"/>
+            <a:ext cx="11106912" cy="1325563"/>
+          </a:xfrm>
+        </p:spPr>
         <p:txBody>
           <a:bodyPr/>
           <a:lstStyle/>
           <a:p>
             <a:r>
-              <a:rPr sz="2600" b="1"/>
+              <a:rPr sz="2600" b="1" dirty="0"/>
               <a:t>COMPARISON WITH STATE OF THE ART</a:t>
             </a:r>
           </a:p>
@@ -7211,13 +7558,18 @@
             <p:ph type="title"/>
           </p:nvPr>
         </p:nvSpPr>
-        <p:spPr/>
+        <p:spPr>
+          <a:xfrm>
+            <a:off x="237744" y="365125"/>
+            <a:ext cx="11116056" cy="1325563"/>
+          </a:xfrm>
+        </p:spPr>
         <p:txBody>
           <a:bodyPr/>
           <a:lstStyle/>
           <a:p>
             <a:r>
-              <a:rPr sz="2600" b="1"/>
+              <a:rPr sz="2600" b="1" dirty="0"/>
               <a:t>SUMMARY AND FUTURE WORK</a:t>
             </a:r>
           </a:p>
@@ -7232,7 +7584,7 @@
         <p:spPr>
           <a:xfrm>
             <a:off x="365760" y="1417320"/>
-            <a:ext cx="5486400" cy="5257800"/>
+            <a:ext cx="11116056" cy="3483005"/>
           </a:xfrm>
           <a:prstGeom prst="rect">
             <a:avLst/>
@@ -7247,7 +7599,7 @@
           <a:p>
             <a:pPr algn="l"/>
             <a:r>
-              <a:rPr sz="1700" b="1">
+              <a:rPr sz="1700" b="1" dirty="0">
                 <a:solidFill>
                   <a:srgbClr val="1F4E79"/>
                 </a:solidFill>
@@ -7258,51 +7610,65 @@
           <a:p>
             <a:pPr algn="l"/>
             <a:r>
-              <a:rPr sz="1300" b="0"/>
+              <a:rPr sz="1300" b="0" dirty="0"/>
               <a:t>  •  End-to-end 3-class CXR classifier on 27,005 images</a:t>
             </a:r>
           </a:p>
           <a:p>
             <a:pPr algn="l"/>
             <a:r>
-              <a:rPr sz="1300" b="0"/>
+              <a:rPr sz="1300" b="0" dirty="0"/>
               <a:t>  •  Ensemble (DenseNet121 + ResNet50 + EfficientNetB0)</a:t>
             </a:r>
+            <a:r>
+              <a:rPr lang="en-US" sz="1300" b="0" dirty="0"/>
+              <a:t> </a:t>
+            </a:r>
+            <a:r>
+              <a:rPr sz="1300" b="1" dirty="0"/>
+              <a:t>–  93.74% accuracy  |  0.9908 macro AUC  |  0.9396 macro F1</a:t>
+            </a:r>
           </a:p>
           <a:p>
             <a:pPr algn="l"/>
             <a:r>
-              <a:rPr sz="1300" b="1"/>
-              <a:t>      –  93.74% accuracy  |  0.9908 macro AUC  |  0.9396 macro F1</a:t>
+              <a:rPr sz="1300" b="0" dirty="0"/>
+              <a:t>  •  Focal Loss + class weights handle severe class imbalance</a:t>
             </a:r>
           </a:p>
           <a:p>
             <a:pPr algn="l"/>
             <a:r>
-              <a:rPr sz="1300" b="0"/>
-              <a:t>  •  Focal Loss + class weights handle severe class imbalance</a:t>
+              <a:rPr sz="1300" b="0" dirty="0"/>
+              <a:t>  •  MC Dropout: 99.40% accuracy on 55.2% high-confidence subset</a:t>
             </a:r>
           </a:p>
           <a:p>
             <a:pPr algn="l"/>
             <a:r>
-              <a:rPr sz="1300" b="0"/>
-              <a:t>  •  MC Dropout: 99.40% accuracy on 55.2% high-confidence subset</a:t>
+              <a:rPr sz="1300" b="0" dirty="0"/>
+              <a:t>  •  Grad-CAM provides radiologist-interpretable saliency overlays</a:t>
             </a:r>
           </a:p>
           <a:p>
             <a:pPr algn="l"/>
             <a:r>
-              <a:rPr sz="1300" b="0"/>
-              <a:t>  •  Grad-CAM provides radiologist-interpretable saliency overlays</a:t>
-            </a:r>
+              <a:rPr sz="1300" b="0" dirty="0"/>
+              <a:t>  •  Deployed as </a:t>
+            </a:r>
+            <a:r>
+              <a:rPr sz="1300" b="0" dirty="0" err="1"/>
+              <a:t>Streamlit</a:t>
+            </a:r>
+            <a:r>
+              <a:rPr sz="1300" b="0" dirty="0"/>
+              <a:t> app: single &amp; batch inference + CSV export</a:t>
+            </a:r>
+            <a:endParaRPr lang="en-US" sz="1300" b="0" dirty="0"/>
           </a:p>
           <a:p>
             <a:pPr algn="l"/>
-            <a:r>
-              <a:rPr sz="1300" b="0"/>
-              <a:t>  •  Deployed as Streamlit app: single &amp; batch inference + CSV export</a:t>
-            </a:r>
+            <a:endParaRPr sz="1300" b="0" dirty="0"/>
           </a:p>
           <a:p>
             <a:pPr algn="l">
@@ -7311,7 +7677,7 @@
               </a:spcBef>
             </a:pPr>
             <a:r>
-              <a:rPr sz="1700" b="1">
+              <a:rPr sz="1700" b="1" dirty="0">
                 <a:solidFill>
                   <a:srgbClr val="1F4E79"/>
                 </a:solidFill>
@@ -7322,16 +7688,21 @@
           <a:p>
             <a:pPr algn="l"/>
             <a:r>
-              <a:rPr sz="1300" b="0"/>
-              <a:t>  •  Two-source dataset — possible domain gap between Kermany and COVID-19 DB</a:t>
-            </a:r>
+              <a:rPr sz="1300" b="0" dirty="0"/>
+              <a:t>  •  Two-source dataset</a:t>
+            </a:r>
+            <a:endParaRPr lang="en-US" sz="1300" b="0" dirty="0"/>
           </a:p>
           <a:p>
             <a:pPr algn="l"/>
             <a:r>
-              <a:rPr sz="1300" b="0"/>
+              <a:rPr lang="en-US" sz="1300" b="0" dirty="0"/>
               <a:t>  •  44.8% referral rate may be high for real-world triage deployment</a:t>
             </a:r>
+          </a:p>
+          <a:p>
+            <a:pPr algn="l"/>
+            <a:endParaRPr sz="1300" b="0" dirty="0"/>
           </a:p>
           <a:p>
             <a:pPr algn="l">
@@ -7340,7 +7711,7 @@
               </a:spcBef>
             </a:pPr>
             <a:r>
-              <a:rPr sz="1700" b="1">
+              <a:rPr sz="1700" b="1" dirty="0">
                 <a:solidFill>
                   <a:srgbClr val="1F4E79"/>
                 </a:solidFill>
@@ -7351,98 +7722,17 @@
           <a:p>
             <a:pPr algn="l"/>
             <a:r>
-              <a:rPr sz="1300" b="0"/>
-              <a:t>  •  Self-supervised / foundation model pretraining on unlabelled CXRs</a:t>
+              <a:rPr lang="en-US" sz="1300" b="0" dirty="0"/>
+              <a:t>  •  Vision-language model for automated radiology report generation</a:t>
             </a:r>
           </a:p>
           <a:p>
             <a:pPr algn="l"/>
             <a:r>
-              <a:rPr sz="1300" b="0"/>
-              <a:t>  •  Vision-language model for automated radiology report generation</a:t>
-            </a:r>
-          </a:p>
-          <a:p>
-            <a:pPr algn="l"/>
-            <a:r>
-              <a:rPr sz="1300" b="0"/>
-              <a:t>  •  Reduce referral rate via temperature scaling / post-hoc calibration</a:t>
-            </a:r>
-          </a:p>
-          <a:p>
-            <a:pPr algn="l"/>
-            <a:r>
-              <a:rPr sz="1300" b="0"/>
-              <a:t>  •  Prospective clinical validation and DICOM integration</a:t>
-            </a:r>
-          </a:p>
-        </p:txBody>
-      </p:sp>
-      <p:sp>
-        <p:nvSpPr>
-          <p:cNvPr id="5" name="TextBox 4"/>
-          <p:cNvSpPr txBox="1"/>
-          <p:nvPr/>
-        </p:nvSpPr>
-        <p:spPr>
-          <a:xfrm>
-            <a:off x="6035040" y="4005072"/>
-            <a:ext cx="5486400" cy="228600"/>
-          </a:xfrm>
-          <a:prstGeom prst="rect">
-            <a:avLst/>
-          </a:prstGeom>
-          <a:noFill/>
-        </p:spPr>
-        <p:txBody>
-          <a:bodyPr wrap="square">
-            <a:spAutoFit/>
-          </a:bodyPr>
-          <a:lstStyle/>
-          <a:p>
-            <a:pPr algn="ctr"/>
-            <a:r>
-              <a:rPr sz="1000" b="0">
-                <a:solidFill>
-                  <a:srgbClr val="505050"/>
-                </a:solidFill>
-              </a:rPr>
-              <a:t>ROC Curves (per class, all models)</a:t>
-            </a:r>
-          </a:p>
-        </p:txBody>
-      </p:sp>
-      <p:sp>
-        <p:nvSpPr>
-          <p:cNvPr id="7" name="TextBox 6"/>
-          <p:cNvSpPr txBox="1"/>
-          <p:nvPr/>
-        </p:nvSpPr>
-        <p:spPr>
-          <a:xfrm>
-            <a:off x="6035040" y="6702551"/>
-            <a:ext cx="5486400" cy="228600"/>
-          </a:xfrm>
-          <a:prstGeom prst="rect">
-            <a:avLst/>
-          </a:prstGeom>
-          <a:noFill/>
-        </p:spPr>
-        <p:txBody>
-          <a:bodyPr wrap="square">
-            <a:spAutoFit/>
-          </a:bodyPr>
-          <a:lstStyle/>
-          <a:p>
-            <a:pPr algn="ctr"/>
-            <a:r>
-              <a:rPr sz="1000" b="0">
-                <a:solidFill>
-                  <a:srgbClr val="505050"/>
-                </a:solidFill>
-              </a:rPr>
-              <a:t>Uncertainty Analysis (MC Dropout, threshold=0.35)</a:t>
-            </a:r>
+              <a:rPr sz="1300" b="0" dirty="0"/>
+              <a:t>  •  Reduce referral rate via temperature scaling</a:t>
+            </a:r>
+            <a:endParaRPr lang="en-US" sz="1300" b="0" dirty="0"/>
           </a:p>
         </p:txBody>
       </p:sp>
@@ -8050,6 +8340,21 @@
 </file>
 
 <file path=customXml/item1.xml><?xml version="1.0" encoding="utf-8"?>
+<?mso-contentType ?>
+<FormTemplates xmlns="http://schemas.microsoft.com/sharepoint/v3/contenttype/forms">
+  <Display>DocumentLibraryForm</Display>
+  <Edit>DocumentLibraryForm</Edit>
+  <New>DocumentLibraryForm</New>
+</FormTemplates>
+</file>
+
+<file path=customXml/item2.xml><?xml version="1.0" encoding="utf-8"?>
+<p:properties xmlns:p="http://schemas.microsoft.com/office/2006/metadata/properties" xmlns:xsi="http://www.w3.org/2001/XMLSchema-instance" xmlns:pc="http://schemas.microsoft.com/office/infopath/2007/PartnerControls">
+  <documentManagement/>
+</p:properties>
+</file>
+
+<file path=customXml/item3.xml><?xml version="1.0" encoding="utf-8"?>
 <ct:contentTypeSchema xmlns:ct="http://schemas.microsoft.com/office/2006/metadata/contentType" xmlns:ma="http://schemas.microsoft.com/office/2006/metadata/properties/metaAttributes" ct:_="" ma:_="" ma:contentTypeName="Document" ma:contentTypeID="0x01010064F7C72483F11D4DA2730B64E78C7605" ma:contentTypeVersion="7" ma:contentTypeDescription="Create a new document." ma:contentTypeScope="" ma:versionID="c5a03561bf4af1bce721cea200ac2399">
   <xsd:schema xmlns:xsd="http://www.w3.org/2001/XMLSchema" xmlns:xs="http://www.w3.org/2001/XMLSchema" xmlns:p="http://schemas.microsoft.com/office/2006/metadata/properties" xmlns:ns2="1159fd8f-c7e5-4925-83b7-d94dc0b8dd75" targetNamespace="http://schemas.microsoft.com/office/2006/metadata/properties" ma:root="true" ma:fieldsID="e529094f237f9660feba51cb96a248ad" ns2:_="">
     <xsd:import namespace="1159fd8f-c7e5-4925-83b7-d94dc0b8dd75"/>
@@ -8211,35 +8516,10 @@
 </ct:contentTypeSchema>
 </file>
 
-<file path=customXml/item2.xml><?xml version="1.0" encoding="utf-8"?>
-<p:properties xmlns:p="http://schemas.microsoft.com/office/2006/metadata/properties" xmlns:xsi="http://www.w3.org/2001/XMLSchema-instance" xmlns:pc="http://schemas.microsoft.com/office/infopath/2007/PartnerControls">
-  <documentManagement/>
-</p:properties>
-</file>
-
-<file path=customXml/item3.xml><?xml version="1.0" encoding="utf-8"?>
-<?mso-contentType ?>
-<FormTemplates xmlns="http://schemas.microsoft.com/sharepoint/v3/contenttype/forms">
-  <Display>DocumentLibraryForm</Display>
-  <Edit>DocumentLibraryForm</Edit>
-  <New>DocumentLibraryForm</New>
-</FormTemplates>
-</file>
-
 <file path=customXml/itemProps1.xml><?xml version="1.0" encoding="utf-8"?>
-<ds:datastoreItem xmlns:ds="http://schemas.openxmlformats.org/officeDocument/2006/customXml" ds:itemID="{34929F1E-2E5A-4BA1-8040-01561CB2BF7D}">
+<ds:datastoreItem xmlns:ds="http://schemas.openxmlformats.org/officeDocument/2006/customXml" ds:itemID="{2C137209-D1C5-4556-A599-C8D98B05EB0B}">
   <ds:schemaRefs>
-    <ds:schemaRef ds:uri="http://schemas.microsoft.com/office/2006/metadata/contentType"/>
-    <ds:schemaRef ds:uri="http://schemas.microsoft.com/office/2006/metadata/properties/metaAttributes"/>
-    <ds:schemaRef ds:uri="http://www.w3.org/2001/XMLSchema"/>
-    <ds:schemaRef ds:uri="http://schemas.microsoft.com/office/2006/metadata/properties"/>
-    <ds:schemaRef ds:uri="1159fd8f-c7e5-4925-83b7-d94dc0b8dd75"/>
-    <ds:schemaRef ds:uri="http://schemas.microsoft.com/office/2006/documentManagement/types"/>
-    <ds:schemaRef ds:uri="http://schemas.microsoft.com/office/infopath/2007/PartnerControls"/>
-    <ds:schemaRef ds:uri="http://schemas.openxmlformats.org/package/2006/metadata/core-properties"/>
-    <ds:schemaRef ds:uri="http://purl.org/dc/elements/1.1/"/>
-    <ds:schemaRef ds:uri="http://purl.org/dc/terms/"/>
-    <ds:schemaRef ds:uri="http://schemas.microsoft.com/internal/obd"/>
+    <ds:schemaRef ds:uri="http://schemas.microsoft.com/sharepoint/v3/contenttype/forms"/>
   </ds:schemaRefs>
 </ds:datastoreItem>
 </file>
@@ -8256,9 +8536,19 @@
 </file>
 
 <file path=customXml/itemProps3.xml><?xml version="1.0" encoding="utf-8"?>
-<ds:datastoreItem xmlns:ds="http://schemas.openxmlformats.org/officeDocument/2006/customXml" ds:itemID="{2C137209-D1C5-4556-A599-C8D98B05EB0B}">
+<ds:datastoreItem xmlns:ds="http://schemas.openxmlformats.org/officeDocument/2006/customXml" ds:itemID="{34929F1E-2E5A-4BA1-8040-01561CB2BF7D}">
   <ds:schemaRefs>
-    <ds:schemaRef ds:uri="http://schemas.microsoft.com/sharepoint/v3/contenttype/forms"/>
+    <ds:schemaRef ds:uri="http://schemas.microsoft.com/office/2006/metadata/contentType"/>
+    <ds:schemaRef ds:uri="http://schemas.microsoft.com/office/2006/metadata/properties/metaAttributes"/>
+    <ds:schemaRef ds:uri="http://www.w3.org/2001/XMLSchema"/>
+    <ds:schemaRef ds:uri="http://schemas.microsoft.com/office/2006/metadata/properties"/>
+    <ds:schemaRef ds:uri="1159fd8f-c7e5-4925-83b7-d94dc0b8dd75"/>
+    <ds:schemaRef ds:uri="http://schemas.microsoft.com/office/2006/documentManagement/types"/>
+    <ds:schemaRef ds:uri="http://schemas.microsoft.com/office/infopath/2007/PartnerControls"/>
+    <ds:schemaRef ds:uri="http://schemas.openxmlformats.org/package/2006/metadata/core-properties"/>
+    <ds:schemaRef ds:uri="http://purl.org/dc/elements/1.1/"/>
+    <ds:schemaRef ds:uri="http://purl.org/dc/terms/"/>
+    <ds:schemaRef ds:uri="http://schemas.microsoft.com/internal/obd"/>
   </ds:schemaRefs>
 </ds:datastoreItem>
 </file>